--- a/docs/risk_engines.pptx
+++ b/docs/risk_engines.pptx
@@ -7995,7 +7995,7 @@
                 </a:solidFill>
                 <a:latin typeface="Calibri"/>
               </a:rPr>
-              <a:t>Contribution shares &amp; case-level averaging</a:t>
+              <a:t>UI readouts &amp; case-level averaging</a:t>
             </a:r>
           </a:p>
         </p:txBody>
@@ -8046,7 +8046,7 @@
                 </a:solidFill>
                 <a:latin typeface="Calibri"/>
               </a:rPr>
-              <a:t>How the per-engine and overall figures in the C&amp;T UI are computed</a:t>
+              <a:t>What the C&amp;T Risk Signals panel shows, and how the backend produces it</a:t>
             </a:r>
           </a:p>
         </p:txBody>
@@ -8060,7 +8060,7 @@
         <p:spPr>
           <a:xfrm>
             <a:off x="457200" y="1188720"/>
-            <a:ext cx="5669280" cy="2560320"/>
+            <a:ext cx="5669280" cy="3108960"/>
           </a:xfrm>
           <a:prstGeom prst="rect">
             <a:avLst/>
@@ -8101,7 +8101,7 @@
                 </a:solidFill>
                 <a:latin typeface="Calibri"/>
               </a:rPr>
-              <a:t>Per-engine CONTRIBUTION SHARE (UI)</a:t>
+              <a:t>Risk Signals panel — two numbers per engine</a:t>
             </a:r>
           </a:p>
           <a:p>
@@ -8113,7 +8113,7 @@
                 </a:solidFill>
                 <a:latin typeface="Calibri"/>
               </a:rPr>
-              <a:t>• For each engine: weighted = engine_avg × ENGINE_WEIGHTS[engine].</a:t>
+              <a:t>• MAIN: contribution in POINTS, on the same 0..100 scale as the overall case risk score. A bar visualises each contribution.</a:t>
             </a:r>
           </a:p>
           <a:p>
@@ -8125,7 +8125,7 @@
                 </a:solidFill>
                 <a:latin typeface="Calibri"/>
               </a:rPr>
-              <a:t>• Total = sum of weighted contributions across the 4 engines.</a:t>
+              <a:t>• SECONDARY (right-aligned, small): engine's SHARE of the case risk (its weighted contribution / sum of the four weighted contributions, normalised to 100 %).</a:t>
             </a:r>
           </a:p>
           <a:p>
@@ -8137,7 +8137,7 @@
                 </a:solidFill>
                 <a:latin typeface="Calibri"/>
               </a:rPr>
-              <a:t>• Share displayed in 'Risk Signals' panel = weighted / total × 100 %.</a:t>
+              <a:t>• Intended reading: the MAIN number tells how much this signal adds to the overall score; the SHARE tells which signal dominates relative to the others.</a:t>
             </a:r>
           </a:p>
           <a:p>
@@ -8149,7 +8149,7 @@
                 </a:solidFill>
                 <a:latin typeface="Calibri"/>
               </a:rPr>
-              <a:t>• By construction the four shares sum to ≈ 100 %, so officers can eyeball which engine dominates the case.</a:t>
+              <a:t>• NARRATIVE: each row carries a context-aware one-liner — fires / mild / quiet — so officers see what the engine is saying without reading raw scores.</a:t>
             </a:r>
           </a:p>
           <a:p>
@@ -8161,7 +8161,7 @@
                 </a:solidFill>
                 <a:latin typeface="Calibri"/>
               </a:rPr>
-              <a:t>• Raw engine severity is also shown underneath the share (the band that set the pre-baked value — 0.02–0.08 quiet, 0.55–0.70 firing).</a:t>
+              <a:t>• Raw engine severity and engine weights are NOT displayed in the UI (avoid inviting questions about weight tuning). They remain in the backend logs and this deck.</a:t>
             </a:r>
           </a:p>
         </p:txBody>
@@ -8175,7 +8175,7 @@
         <p:spPr>
           <a:xfrm>
             <a:off x="6400800" y="1188720"/>
-            <a:ext cx="5303520" cy="2560320"/>
+            <a:ext cx="5303520" cy="3108960"/>
           </a:xfrm>
           <a:prstGeom prst="rect">
             <a:avLst/>
@@ -8252,7 +8252,7 @@
                 </a:solidFill>
                 <a:latin typeface="Calibri"/>
               </a:rPr>
-              <a:t>•   Engine_X_new  = (Engine_X_old × (n-1) + order_Engine_X) / n</a:t>
+              <a:t>•   Engine_X_new = (Engine_X_old × (n-1) + order_Engine_X) / n</a:t>
             </a:r>
           </a:p>
           <a:p>
@@ -8264,7 +8264,7 @@
                 </a:solidFill>
                 <a:latin typeface="Calibri"/>
               </a:rPr>
-              <a:t>•   Overall_new   = (Overall_old  × (n-1) + order_score)   / n</a:t>
+              <a:t>•   Overall_new  = (Overall_old  × (n-1) + order_score)    / n</a:t>
             </a:r>
           </a:p>
           <a:p>
@@ -8277,6 +8277,18 @@
                 <a:latin typeface="Calibri"/>
               </a:rPr>
               <a:t>• Each engine field on Sales_Order_Case is an arithmetic mean across every order in the case — not a snapshot of the first transaction.</a:t>
+            </a:r>
+          </a:p>
+          <a:p>
+            <a:pPr algn="l"/>
+            <a:r>
+              <a:rPr sz="1200">
+                <a:solidFill>
+                  <a:srgbClr val="222222"/>
+                </a:solidFill>
+                <a:latin typeface="Calibri"/>
+              </a:rPr>
+              <a:t>• Contribution pts and share used in the UI are computed from these case-level averages.</a:t>
             </a:r>
           </a:p>
         </p:txBody>
@@ -8289,8 +8301,8 @@
         </p:nvSpPr>
         <p:spPr>
           <a:xfrm>
-            <a:off x="457200" y="3931920"/>
-            <a:ext cx="11247120" cy="2560320"/>
+            <a:off x="457200" y="4480560"/>
+            <a:ext cx="11247120" cy="2103120"/>
           </a:xfrm>
           <a:prstGeom prst="rect">
             <a:avLst/>
@@ -8331,7 +8343,7 @@
                 </a:solidFill>
                 <a:latin typeface="Calibri"/>
               </a:rPr>
-              <a:t>⚠ Non-linearity caveat — shares are an approximation</a:t>
+              <a:t>⚠ Why the contributions only SUM APPROXIMATELY to the overall</a:t>
             </a:r>
           </a:p>
           <a:p>
@@ -8343,7 +8355,7 @@
                 </a:solidFill>
                 <a:latin typeface="Calibri"/>
               </a:rPr>
-              <a:t>• Per-order score passes through the weighted sum AND the vat_ratio floor AND the min(1.0, …) cap. Only the linear part (weighted sum) commutes with averaging.</a:t>
+              <a:t>• Per-order score passes through the weighted sum AND the vat_ratio floor AND the min(1.0, …) cap. Only the weighted-sum part commutes with averaging across orders.</a:t>
             </a:r>
           </a:p>
           <a:p>
@@ -8355,7 +8367,7 @@
                 </a:solidFill>
                 <a:latin typeface="Calibri"/>
               </a:rPr>
-              <a:t>• Consequence: Overall_Case_Risk_Score ≠ Σ ENGINE_WEIGHTS × Engine_X_avg whenever the floor or the cap fired on any order in the case.</a:t>
+              <a:t>• Consequence: Σ (ENGINE_WEIGHTS × Engine_X_avg) ≠ Overall_Case_Risk_Score whenever the floor or the cap fired on any order in the case — small residual on the order of a few points.</a:t>
             </a:r>
           </a:p>
           <a:p>
@@ -8367,19 +8379,7 @@
                 </a:solidFill>
                 <a:latin typeface="Calibri"/>
               </a:rPr>
-              <a:t>• For cases where no order ever crossed the floor (raw vat_ratio &lt; 0.30 everywhere) and no order ever hit the cap (total weighted ≤ 1.0), the two are exactly equal and the shares reconstruct the overall.</a:t>
-            </a:r>
-          </a:p>
-          <a:p>
-            <a:pPr algn="l"/>
-            <a:r>
-              <a:rPr sz="1200">
-                <a:solidFill>
-                  <a:srgbClr val="222222"/>
-                </a:solidFill>
-                <a:latin typeface="Calibri"/>
-              </a:rPr>
-              <a:t>• For cases where floor/cap fired on some orders, the displayed shares still sum to 100 % and still rank engines correctly by contribution, but reconstructing the overall from them involves a small residual that carries the floor/cap effect.</a:t>
+              <a:t>• Officer-facing implication: the four contribution bars sum to roughly the overall score; shares sum to 100 %. Both are approximations of the same underlying case-level risk, useful for different questions.</a:t>
             </a:r>
           </a:p>
         </p:txBody>

--- a/docs/risk_engines.pptx
+++ b/docs/risk_engines.pptx
@@ -4732,7 +4732,7 @@
                 </a:solidFill>
                 <a:latin typeface="Calibri"/>
               </a:rPr>
-              <a:t>• Key the tx by (buyer_country, vat_subcategory_code).</a:t>
+              <a:t>• Key each tx by (destination country, declared VAT subcategory).</a:t>
             </a:r>
           </a:p>
           <a:p>
@@ -4744,7 +4744,7 @@
                 </a:solidFill>
                 <a:latin typeface="Calibri"/>
               </a:rPr>
-              <a:t>• Look up the expected rate via lib.vat_dataset.expected_rate_for(...). The lookup is built from the 78 observed (dest, subcat) pairs in the xlsx; for unobserved pairs it falls back to the destination's standard rate.</a:t>
+              <a:t>• Consult the canonical (destination × subcategory) → rate table maintained by the EU VAT Expected-Rate service.</a:t>
             </a:r>
           </a:p>
           <a:p>
@@ -4756,7 +4756,7 @@
                 </a:solidFill>
                 <a:latin typeface="Calibri"/>
               </a:rPr>
-              <a:t>• Compare declared_rate to expected_rate — emit 1.0 on mismatch, 0.0 on match.</a:t>
+              <a:t>• Compare the declared rate to the expected rate. The engine score reflects how severe the mismatch is (graded 0 – 1).</a:t>
             </a:r>
           </a:p>
           <a:p>
@@ -4768,7 +4768,7 @@
                 </a:solidFill>
                 <a:latin typeface="Calibri"/>
               </a:rPr>
-              <a:t>• Floor behaviour at consolidation: when raw risk ≥ 0.30 the engine's contribution is floored to ≥ 0.334 so any genuine rate mismatch at least investigates, regardless of weighting.</a:t>
+              <a:t>• Severe mismatches trigger an investigate floor at consolidation (see the Consolidation slide).</a:t>
             </a:r>
           </a:p>
         </p:txBody>
@@ -4835,7 +4835,7 @@
                 </a:solidFill>
                 <a:latin typeface="Calibri"/>
               </a:rPr>
-              <a:t>• risk ∈ [0, 1] — graded (raw = Score 1 / 100 from xlsx) when pre-baked; binary 0/1 from the subcategory lookup otherwise.</a:t>
+              <a:t>• Engine score in [0, 1] — 0 for a clean match, higher as the declared rate drifts further from the expected rate.</a:t>
             </a:r>
           </a:p>
           <a:p>
@@ -4847,7 +4847,7 @@
                 </a:solidFill>
                 <a:latin typeface="Calibri"/>
               </a:rPr>
-              <a:t>• reason: prebaked / rate_mismatch / rate_match / unknown_subcategory / alarm_*</a:t>
+              <a:t>• reason: rate_mismatch / rate_match / unknown_subcategory</a:t>
             </a:r>
           </a:p>
           <a:p>
@@ -4926,7 +4926,7 @@
                 </a:solidFill>
                 <a:latin typeface="Calibri"/>
               </a:rPr>
-              <a:t>• Pre-baked value: every tx in simulation.db carries engine_vat_ratio_risk set at seed time from xlsx Score 1 ÷ 100, GATED by actual rate mismatch (xlsx zeroes Score 1 when declared = recommended, i.e. misclassification with no revenue impact).</a:t>
+              <a:t>• The demo dataset pre-bakes the engine score at seed time from xlsx Score 1 ÷ 100, gated by actual rate mismatch (xlsx zeroes Score 1 when declared = recommended — i.e. category mismatch with no revenue impact, which is not actionable).</a:t>
             </a:r>
           </a:p>
           <a:p>
@@ -4938,6 +4938,18 @@
                 </a:solidFill>
                 <a:latin typeface="Calibri"/>
               </a:rPr>
+              <a:t>• Engine reads engine_vat_ratio_risk off the tx row verbatim rather than recomputing from the subcategory table each run.</a:t>
+            </a:r>
+          </a:p>
+          <a:p>
+            <a:pPr algn="l"/>
+            <a:r>
+              <a:rPr sz="1100">
+                <a:solidFill>
+                  <a:srgbClr val="222222"/>
+                </a:solidFill>
+                <a:latin typeface="Calibri"/>
+              </a:rPr>
               <a:t>• Legacy fallback (historical seeder only): 7-day vs 8-week VAT/value volume-ratio alarm. Kept so Sep–Feb historical transactions still route through the pipeline without pre-baked fields.</a:t>
             </a:r>
           </a:p>
@@ -4950,7 +4962,7 @@
                 </a:solidFill>
                 <a:latin typeface="Calibri"/>
               </a:rPr>
-              <a:t>• Demo benefit: routing is deterministic and reproducible from the xlsx — no need for the seeder to compute rate tables at runtime.</a:t>
+              <a:t>• Demo benefit: routing is deterministic and reproducible from the xlsx — no need to maintain a live expected-rate table.</a:t>
             </a:r>
           </a:p>
         </p:txBody>
@@ -5137,7 +5149,7 @@
                 </a:solidFill>
                 <a:latin typeface="Calibri"/>
               </a:rPr>
-              <a:t>• Per-tx supplier compliance risk: how often has this (seller, origin, category, destination) pattern been flagged historically?</a:t>
+              <a:t>• Per-tx supplier compliance risk: does this (seller, origin, product category, destination) pattern look like seller behaviours the authority has flagged in past investigations?</a:t>
             </a:r>
           </a:p>
           <a:p>
@@ -5216,7 +5228,7 @@
                 </a:solidFill>
                 <a:latin typeface="Calibri"/>
               </a:rPr>
-              <a:t>• Look up the 4-tuple (seller, origin, declared_category, destination) against lib.database.ml_risk_rules.</a:t>
+              <a:t>• A supervised ML model trained on the authority's historical closed-case dataset (confirmed fraud vs. cleared).</a:t>
             </a:r>
           </a:p>
           <a:p>
@@ -5228,7 +5240,7 @@
                 </a:solidFill>
                 <a:latin typeface="Calibri"/>
               </a:rPr>
-              <a:t>• If a rule matches: emit rule.risk plus the four weighted contributors.</a:t>
+              <a:t>• Retraining cadence is offline and periodic — e.g. a nightly or weekly batch job against the latest labelled cases. It is NOT retrained in the live path.</a:t>
             </a:r>
           </a:p>
           <a:p>
@@ -5240,7 +5252,7 @@
                 </a:solidFill>
                 <a:latin typeface="Calibri"/>
               </a:rPr>
-              <a:t>• If no rule matches: emit risk = 0.0 (clear).</a:t>
+              <a:t>• At pipeline runtime only INFERENCE happens: the tx's four features (seller, origin, declared category, destination) go into the most recently trained model, which returns a risk score and per-dimension contribution weights.</a:t>
             </a:r>
           </a:p>
           <a:p>
@@ -5252,7 +5264,7 @@
                 </a:solidFill>
                 <a:latin typeface="Calibri"/>
               </a:rPr>
-              <a:t>• Flag threshold: ML_RISK_FLAG_THRESHOLD = 0.5 (informational; the consolidator uses the raw risk).</a:t>
+              <a:t>• Flag threshold: ML_RISK_FLAG_THRESHOLD = 0.5 (informational; the consolidator uses the engine score directly).</a:t>
             </a:r>
           </a:p>
         </p:txBody>
@@ -5319,7 +5331,7 @@
                 </a:solidFill>
                 <a:latin typeface="Calibri"/>
               </a:rPr>
-              <a:t>• risk ∈ [0, 1] — graded, discrete buckets from xlsx (0, 0.40, 0.90).</a:t>
+              <a:t>• Engine score in [0, 1] — probability-like, continuous in production.</a:t>
             </a:r>
           </a:p>
           <a:p>
@@ -5331,7 +5343,7 @@
                 </a:solidFill>
                 <a:latin typeface="Calibri"/>
               </a:rPr>
-              <a:t>• description, seller_risk, country_risk, product_category_risk, destination_risk — propagated into ASSESSMENT_OUTCOME and written onto Sales_Order_Risk at case creation.</a:t>
+              <a:t>• description, seller_risk, country_risk, product_category_risk, destination_risk — the four per-dimension contributions to the risk. Propagated into ASSESSMENT_OUTCOME and written onto Sales_Order_Risk at case creation.</a:t>
             </a:r>
           </a:p>
           <a:p>
@@ -5343,7 +5355,7 @@
                 </a:solidFill>
                 <a:latin typeface="Calibri"/>
               </a:rPr>
-              <a:t>• reason: prebaked_match / prebaked_clear / ml_watchlist_match / clear</a:t>
+              <a:t>• reason: match / clear</a:t>
             </a:r>
           </a:p>
         </p:txBody>
@@ -5410,7 +5422,7 @@
                 </a:solidFill>
                 <a:latin typeface="Calibri"/>
               </a:rPr>
-              <a:t>• Pre-baked value: engine_ml_risk set per-tx at seed time from xlsx Score 3 ÷ 100 (0, 0.40, or 0.90). Contributor weights also pre-baked — all attributed to the seller dimension (seller_contribution = 1.0) since xlsx Score 3 captures supplier risk specifically.</a:t>
+              <a:t>• No live model in the demo — the entire ML path is replaced by a pre-baked memoised-inference table.</a:t>
             </a:r>
           </a:p>
           <a:p>
@@ -5422,7 +5434,7 @@
                 </a:solidFill>
                 <a:latin typeface="Calibri"/>
               </a:rPr>
-              <a:t>• Legacy fallback: 4-tuple rule lookup in ml_risk_rules table, seeded from Context/Fake ML.xlsx. Used only when pre-baked field is NULL (legacy historical tx).</a:t>
+              <a:t>• TWO-LAYER LOOKUP (both are just static tables seeded at build time):</a:t>
             </a:r>
           </a:p>
           <a:p>
@@ -5434,7 +5446,31 @@
                 </a:solidFill>
                 <a:latin typeface="Calibri"/>
               </a:rPr>
-              <a:t>• Demo benefit: avoids training or shipping an actual model; xlsx Score 3 is the ground-truth 'ML output'.</a:t>
+              <a:t>•   1. Per-tx overrides (new dataset). The seeder writes engine_ml_risk      plus the four contributors directly onto each tx row, sourced      from xlsx Score 3 ÷ 100 (0, 0.40, or 0.90). Engine reads these      off the tx verbatim.</a:t>
+            </a:r>
+          </a:p>
+          <a:p>
+            <a:pPr algn="l"/>
+            <a:r>
+              <a:rPr sz="1100">
+                <a:solidFill>
+                  <a:srgbClr val="222222"/>
+                </a:solidFill>
+                <a:latin typeface="Calibri"/>
+              </a:rPr>
+              <a:t>•   2. Legacy 4-tuple table. For tx that lack the per-tx override      (Sep–Feb historical rows) the engine falls back to a lookup      against ml_risk_rules in european_custom.db, seeded once from      Context/Fake ML.xlsx and keyed on (seller, origin, category,      destination).</a:t>
+            </a:r>
+          </a:p>
+          <a:p>
+            <a:pPr algn="l"/>
+            <a:r>
+              <a:rPr sz="1100">
+                <a:solidFill>
+                  <a:srgbClr val="222222"/>
+                </a:solidFill>
+                <a:latin typeface="Calibri"/>
+              </a:rPr>
+              <a:t>• Demo benefit: deterministic, reproducible, and avoids the operational burden of training + serving a real classifier; the xlsx scores play the role of the trained model's output.</a:t>
             </a:r>
           </a:p>
         </p:txBody>
@@ -5621,7 +5657,7 @@
                 </a:solidFill>
                 <a:latin typeface="Calibri"/>
               </a:rPr>
-              <a:t>• Country-specific signal hosted (in production) on a server managed by the Irish authority.</a:t>
+              <a:t>• A country-specific signal: whether the seller of this tx is on the blacklist maintained by the Irish authority.</a:t>
             </a:r>
           </a:p>
           <a:p>
@@ -5633,7 +5669,7 @@
                 </a:solidFill>
                 <a:latin typeface="Calibri"/>
               </a:rPr>
-              <a:t>• Checks whether a given (seller_id, seller_country) pair is on Ireland's local blacklist.</a:t>
+              <a:t>• Applies only to IE-destined orders. Non-IE orders are marked applicable = False and excluded from the consolidator's denominator.</a:t>
             </a:r>
           </a:p>
         </p:txBody>
@@ -5700,7 +5736,7 @@
                 </a:solidFill>
                 <a:latin typeface="Calibri"/>
               </a:rPr>
-              <a:t>• Subscribe to every SALES_ORDER_EVENT but only PROCESS events whose buyer_country == 'IE'.</a:t>
+              <a:t>• In production the engine calls out to a service hosted by the Irish authority, which keeps an authoritative (seller_id, seller_country) blacklist — updated and administered outside the EU hub.</a:t>
             </a:r>
           </a:p>
           <a:p>
@@ -5712,7 +5748,7 @@
                 </a:solidFill>
                 <a:latin typeface="Calibri"/>
               </a:rPr>
-              <a:t>• Non-IE events are immediately published with applicable = False and excluded from the consolidator's denominator.</a:t>
+              <a:t>• Per request: look up the pair and return match / clear.</a:t>
             </a:r>
           </a:p>
           <a:p>
@@ -5724,19 +5760,7 @@
                 </a:solidFill>
                 <a:latin typeface="Calibri"/>
               </a:rPr>
-              <a:t>• Apply a random 1–5 second sleep simulating the round-trip to a remote server. Because that latency can exceed ASSESSMENT_TIMER_S (3 s), some IE outcomes legitimately arrive after the consolidator has already published — by design.</a:t>
-            </a:r>
-          </a:p>
-          <a:p>
-            <a:pPr algn="l"/>
-            <a:r>
-              <a:rPr sz="1200">
-                <a:solidFill>
-                  <a:srgbClr val="222222"/>
-                </a:solidFill>
-                <a:latin typeface="Calibri"/>
-              </a:rPr>
-              <a:t>• Look up (seller_id, seller_country) in the IE_WATCHLIST frozenset; emit 1.0 on match, 0.0 on miss.</a:t>
+              <a:t>• Only IE-bound tx are queried; for everything else the engine short-circuits with applicable = False.</a:t>
             </a:r>
           </a:p>
         </p:txBody>
@@ -5803,7 +5827,7 @@
                 </a:solidFill>
                 <a:latin typeface="Calibri"/>
               </a:rPr>
-              <a:t>• risk ∈ [0, 1] — binary (1.0 match / 0.0 miss) in production; graded 0.0 pre-bake in the current dataset.</a:t>
+              <a:t>• Engine score in [0, 1] — binary in production (1.0 match / 0.0 miss).</a:t>
             </a:r>
           </a:p>
           <a:p>
@@ -5827,7 +5851,7 @@
                 </a:solidFill>
                 <a:latin typeface="Calibri"/>
               </a:rPr>
-              <a:t>• reason: prebaked_clear / ie_watchlist_match / clear / not_applicable</a:t>
+              <a:t>• reason: ie_watchlist_match / clear / not_applicable</a:t>
             </a:r>
           </a:p>
         </p:txBody>
@@ -5894,7 +5918,7 @@
                 </a:solidFill>
                 <a:latin typeface="Calibri"/>
               </a:rPr>
-              <a:t>• Static set IE_WATCHLIST in lib/watchlist.py is currently EMPTY. All IE-destined tx land in 'clear'.</a:t>
+              <a:t>• No live Irish-authority service in the demo — replaced by a static in-memory set IE_WATCHLIST in lib/watchlist.py, currently EMPTY so every IE tx lands in 'clear'.</a:t>
             </a:r>
           </a:p>
           <a:p>
@@ -5906,7 +5930,7 @@
                 </a:solidFill>
                 <a:latin typeface="Calibri"/>
               </a:rPr>
-              <a:t>• Pre-baked value: engine_ie_watchlist_risk = 0.0 for every IE tx at seed time so the engine stays on the pre-baked path rather than hitting the empty set.</a:t>
+              <a:t>• Per-tx pre-bake: engine_ie_watchlist_risk = 0.0 on every IE tx at seed time so the engine uses the pre-baked value rather than hitting the empty set.</a:t>
             </a:r>
           </a:p>
           <a:p>
@@ -5918,7 +5942,19 @@
                 </a:solidFill>
                 <a:latin typeface="Calibri"/>
               </a:rPr>
-              <a:t>• Demo benefit: demonstrates the country-specific-engine pattern (latency, applicability, remote hosting) without actually importing an Irish authority feed. The empty watchlist keeps the engine visible in every case breakdown at 0 %.</a:t>
+              <a:t>• Network-latency simulation (1–5 s random sleep) is added in the fallback path to reproduce the real round-trip to the remote service. Because the sleep can exceed ASSESSMENT_TIMER_S (3 s), some IE outcomes legitimately arrive after the consolidator has published — intentional, exercises the 'late outcome' branch.</a:t>
+            </a:r>
+          </a:p>
+          <a:p>
+            <a:pPr algn="l"/>
+            <a:r>
+              <a:rPr sz="1100">
+                <a:solidFill>
+                  <a:srgbClr val="222222"/>
+                </a:solidFill>
+                <a:latin typeface="Calibri"/>
+              </a:rPr>
+              <a:t>• Demo benefit: shows the country-specific-engine pattern (remote authority, applicability gate) without needing an actual external feed. Empty watchlist keeps the engine visible at 0 % on every IE case breakdown.</a:t>
             </a:r>
           </a:p>
         </p:txBody>
@@ -6547,8 +6583,75 @@
         </p:nvSpPr>
         <p:spPr>
           <a:xfrm>
-            <a:off x="548640" y="1280160"/>
-            <a:ext cx="11064240" cy="731520"/>
+            <a:off x="457200" y="1143000"/>
+            <a:ext cx="11247120" cy="1051560"/>
+          </a:xfrm>
+          <a:prstGeom prst="rect">
+            <a:avLst/>
+          </a:prstGeom>
+          <a:solidFill>
+            <a:srgbClr val="FFFFFF"/>
+          </a:solidFill>
+          <a:ln w="15875">
+            <a:solidFill>
+              <a:srgbClr val="003399"/>
+            </a:solidFill>
+          </a:ln>
+          <a:effectLst/>
+        </p:spPr>
+        <p:style>
+          <a:lnRef idx="1">
+            <a:schemeClr val="accent1"/>
+          </a:lnRef>
+          <a:fillRef idx="3">
+            <a:schemeClr val="accent1"/>
+          </a:fillRef>
+          <a:effectRef idx="2">
+            <a:schemeClr val="accent1"/>
+          </a:effectRef>
+          <a:fontRef idx="minor">
+            <a:schemeClr val="lt1"/>
+          </a:fontRef>
+        </p:style>
+        <p:txBody>
+          <a:bodyPr rtlCol="0" anchor="ctr" lIns="137160" rIns="137160" tIns="91440" bIns="91440" wrap="square"/>
+          <a:lstStyle/>
+          <a:p>
+            <a:pPr algn="l"/>
+            <a:r>
+              <a:rPr b="1" sz="1400">
+                <a:solidFill>
+                  <a:srgbClr val="003399"/>
+                </a:solidFill>
+                <a:latin typeface="Calibri"/>
+              </a:rPr>
+              <a:t>What each engine emits</a:t>
+            </a:r>
+          </a:p>
+          <a:p>
+            <a:pPr algn="l"/>
+            <a:r>
+              <a:rPr sz="1100">
+                <a:solidFill>
+                  <a:srgbClr val="222222"/>
+                </a:solidFill>
+                <a:latin typeface="Calibri"/>
+              </a:rPr>
+              <a:t>• Each engine publishes an ENGINE SCORE in [0, 1] — its own reading of how suspicious this single tx looks on that dimension. 0 = clean, 1 = maximally suspicious. Different engines use different scales (binary, graded, probabilistic); the consolidator is what ties them into one case-level score.</a:t>
+            </a:r>
+          </a:p>
+        </p:txBody>
+      </p:sp>
+      <p:sp>
+        <p:nvSpPr>
+          <p:cNvPr id="5" name="Rectangle 4"/>
+          <p:cNvSpPr/>
+          <p:nvPr/>
+        </p:nvSpPr>
+        <p:spPr>
+          <a:xfrm>
+            <a:off x="548640" y="2331720"/>
+            <a:ext cx="11064240" cy="548640"/>
           </a:xfrm>
           <a:prstGeom prst="rect">
             <a:avLst/>
@@ -6583,27 +6686,27 @@
           <a:p>
             <a:pPr algn="ctr"/>
             <a:r>
-              <a:rPr sz="1600" b="1">
+              <a:rPr sz="1400" b="1">
                 <a:solidFill>
                   <a:srgbClr val="003399"/>
                 </a:solidFill>
                 <a:latin typeface="Calibri"/>
               </a:rPr>
-              <a:t>score = min( 1.0 ,  Σ  ENGINE_WEIGHTS[eng] × engine.risk   for every APPLICABLE engine )</a:t>
-            </a:r>
-          </a:p>
-        </p:txBody>
-      </p:sp>
-      <p:sp>
-        <p:nvSpPr>
-          <p:cNvPr id="5" name="Rectangle 4"/>
+              <a:t>case_score = min( 1.0 ,  Σ  ENGINE_WEIGHTS[eng] × engine_score[eng]   for every APPLICABLE engine )</a:t>
+            </a:r>
+          </a:p>
+        </p:txBody>
+      </p:sp>
+      <p:sp>
+        <p:nvSpPr>
+          <p:cNvPr id="6" name="Rectangle 5"/>
           <p:cNvSpPr/>
           <p:nvPr/>
         </p:nvSpPr>
         <p:spPr>
           <a:xfrm>
-            <a:off x="548640" y="2286000"/>
-            <a:ext cx="4572000" cy="365760"/>
+            <a:off x="548640" y="3017520"/>
+            <a:ext cx="4114800" cy="320040"/>
           </a:xfrm>
           <a:prstGeom prst="rect">
             <a:avLst/>
@@ -6634,7 +6737,7 @@
           <a:p>
             <a:pPr algn="l"/>
             <a:r>
-              <a:rPr sz="1500" b="1">
+              <a:rPr sz="1300" b="1">
                 <a:solidFill>
                   <a:srgbClr val="003399"/>
                 </a:solidFill>
@@ -6647,14 +6750,14 @@
       </p:sp>
       <p:sp>
         <p:nvSpPr>
-          <p:cNvPr id="6" name="Rectangle 5"/>
+          <p:cNvPr id="7" name="Rectangle 6"/>
           <p:cNvSpPr/>
           <p:nvPr/>
         </p:nvSpPr>
         <p:spPr>
           <a:xfrm>
-            <a:off x="548640" y="2651760"/>
-            <a:ext cx="3108960" cy="411480"/>
+            <a:off x="548640" y="3337560"/>
+            <a:ext cx="2743200" cy="347472"/>
           </a:xfrm>
           <a:prstGeom prst="rect">
             <a:avLst/>
@@ -6689,7 +6792,7 @@
           <a:p>
             <a:pPr algn="l"/>
             <a:r>
-              <a:rPr sz="1200" b="0">
+              <a:rPr sz="1100" b="0">
                 <a:solidFill>
                   <a:srgbClr val="222222"/>
                 </a:solidFill>
@@ -6702,14 +6805,14 @@
       </p:sp>
       <p:sp>
         <p:nvSpPr>
-          <p:cNvPr id="7" name="Rectangle 6"/>
+          <p:cNvPr id="8" name="Rectangle 7"/>
           <p:cNvSpPr/>
           <p:nvPr/>
         </p:nvSpPr>
         <p:spPr>
           <a:xfrm>
-            <a:off x="3657600" y="2651760"/>
-            <a:ext cx="914400" cy="411480"/>
+            <a:off x="3291840" y="3337560"/>
+            <a:ext cx="731520" cy="347472"/>
           </a:xfrm>
           <a:prstGeom prst="rect">
             <a:avLst/>
@@ -6744,7 +6847,7 @@
           <a:p>
             <a:pPr algn="ctr"/>
             <a:r>
-              <a:rPr sz="1200" b="1">
+              <a:rPr sz="1100" b="1">
                 <a:solidFill>
                   <a:srgbClr val="222222"/>
                 </a:solidFill>
@@ -6757,14 +6860,14 @@
       </p:sp>
       <p:sp>
         <p:nvSpPr>
-          <p:cNvPr id="8" name="Rectangle 7"/>
+          <p:cNvPr id="9" name="Rectangle 8"/>
           <p:cNvSpPr/>
           <p:nvPr/>
         </p:nvSpPr>
         <p:spPr>
           <a:xfrm>
-            <a:off x="548640" y="3108960"/>
-            <a:ext cx="3108960" cy="411480"/>
+            <a:off x="548640" y="3721608"/>
+            <a:ext cx="2743200" cy="347472"/>
           </a:xfrm>
           <a:prstGeom prst="rect">
             <a:avLst/>
@@ -6799,7 +6902,7 @@
           <a:p>
             <a:pPr algn="l"/>
             <a:r>
-              <a:rPr sz="1200" b="0">
+              <a:rPr sz="1100" b="0">
                 <a:solidFill>
                   <a:srgbClr val="222222"/>
                 </a:solidFill>
@@ -6812,14 +6915,14 @@
       </p:sp>
       <p:sp>
         <p:nvSpPr>
-          <p:cNvPr id="9" name="Rectangle 8"/>
+          <p:cNvPr id="10" name="Rectangle 9"/>
           <p:cNvSpPr/>
           <p:nvPr/>
         </p:nvSpPr>
         <p:spPr>
           <a:xfrm>
-            <a:off x="3657600" y="3108960"/>
-            <a:ext cx="914400" cy="411480"/>
+            <a:off x="3291840" y="3721608"/>
+            <a:ext cx="731520" cy="347472"/>
           </a:xfrm>
           <a:prstGeom prst="rect">
             <a:avLst/>
@@ -6854,7 +6957,7 @@
           <a:p>
             <a:pPr algn="ctr"/>
             <a:r>
-              <a:rPr sz="1200" b="1">
+              <a:rPr sz="1100" b="1">
                 <a:solidFill>
                   <a:srgbClr val="222222"/>
                 </a:solidFill>
@@ -6867,14 +6970,14 @@
       </p:sp>
       <p:sp>
         <p:nvSpPr>
-          <p:cNvPr id="10" name="Rectangle 9"/>
+          <p:cNvPr id="11" name="Rectangle 10"/>
           <p:cNvSpPr/>
           <p:nvPr/>
         </p:nvSpPr>
         <p:spPr>
           <a:xfrm>
-            <a:off x="548640" y="3566160"/>
-            <a:ext cx="3108960" cy="411480"/>
+            <a:off x="548640" y="4105656"/>
+            <a:ext cx="2743200" cy="347472"/>
           </a:xfrm>
           <a:prstGeom prst="rect">
             <a:avLst/>
@@ -6909,7 +7012,7 @@
           <a:p>
             <a:pPr algn="l"/>
             <a:r>
-              <a:rPr sz="1200" b="0">
+              <a:rPr sz="1100" b="0">
                 <a:solidFill>
                   <a:srgbClr val="222222"/>
                 </a:solidFill>
@@ -6922,14 +7025,14 @@
       </p:sp>
       <p:sp>
         <p:nvSpPr>
-          <p:cNvPr id="11" name="Rectangle 10"/>
+          <p:cNvPr id="12" name="Rectangle 11"/>
           <p:cNvSpPr/>
           <p:nvPr/>
         </p:nvSpPr>
         <p:spPr>
           <a:xfrm>
-            <a:off x="3657600" y="3566160"/>
-            <a:ext cx="914400" cy="411480"/>
+            <a:off x="3291840" y="4105656"/>
+            <a:ext cx="731520" cy="347472"/>
           </a:xfrm>
           <a:prstGeom prst="rect">
             <a:avLst/>
@@ -6964,7 +7067,7 @@
           <a:p>
             <a:pPr algn="ctr"/>
             <a:r>
-              <a:rPr sz="1200" b="1">
+              <a:rPr sz="1100" b="1">
                 <a:solidFill>
                   <a:srgbClr val="222222"/>
                 </a:solidFill>
@@ -6977,14 +7080,14 @@
       </p:sp>
       <p:sp>
         <p:nvSpPr>
-          <p:cNvPr id="12" name="Rectangle 11"/>
+          <p:cNvPr id="13" name="Rectangle 12"/>
           <p:cNvSpPr/>
           <p:nvPr/>
         </p:nvSpPr>
         <p:spPr>
           <a:xfrm>
-            <a:off x="548640" y="4023360"/>
-            <a:ext cx="3108960" cy="411480"/>
+            <a:off x="548640" y="4489704"/>
+            <a:ext cx="2743200" cy="347472"/>
           </a:xfrm>
           <a:prstGeom prst="rect">
             <a:avLst/>
@@ -7019,7 +7122,7 @@
           <a:p>
             <a:pPr algn="l"/>
             <a:r>
-              <a:rPr sz="1200" b="0">
+              <a:rPr sz="1100" b="0">
                 <a:solidFill>
                   <a:srgbClr val="222222"/>
                 </a:solidFill>
@@ -7032,14 +7135,14 @@
       </p:sp>
       <p:sp>
         <p:nvSpPr>
-          <p:cNvPr id="13" name="Rectangle 12"/>
+          <p:cNvPr id="14" name="Rectangle 13"/>
           <p:cNvSpPr/>
           <p:nvPr/>
         </p:nvSpPr>
         <p:spPr>
           <a:xfrm>
-            <a:off x="3657600" y="4023360"/>
-            <a:ext cx="914400" cy="411480"/>
+            <a:off x="3291840" y="4489704"/>
+            <a:ext cx="731520" cy="347472"/>
           </a:xfrm>
           <a:prstGeom prst="rect">
             <a:avLst/>
@@ -7074,7 +7177,7 @@
           <a:p>
             <a:pPr algn="ctr"/>
             <a:r>
-              <a:rPr sz="1200" b="1">
+              <a:rPr sz="1100" b="1">
                 <a:solidFill>
                   <a:srgbClr val="222222"/>
                 </a:solidFill>
@@ -7087,14 +7190,14 @@
       </p:sp>
       <p:sp>
         <p:nvSpPr>
-          <p:cNvPr id="14" name="Rectangle 13"/>
+          <p:cNvPr id="15" name="Rectangle 14"/>
           <p:cNvSpPr/>
           <p:nvPr/>
         </p:nvSpPr>
         <p:spPr>
           <a:xfrm>
-            <a:off x="5303520" y="2286000"/>
-            <a:ext cx="6400800" cy="2468880"/>
+            <a:off x="4572000" y="3017520"/>
+            <a:ext cx="7132320" cy="2011680"/>
           </a:xfrm>
           <a:prstGeom prst="rect">
             <a:avLst/>
@@ -7129,7 +7232,7 @@
           <a:p>
             <a:pPr algn="l"/>
             <a:r>
-              <a:rPr b="1" sz="1600">
+              <a:rPr b="1" sz="1400">
                 <a:solidFill>
                   <a:srgbClr val="E6820A"/>
                 </a:solidFill>
@@ -7141,51 +7244,51 @@
           <a:p>
             <a:pPr algn="l"/>
             <a:r>
-              <a:rPr sz="1200">
+              <a:rPr sz="1100">
                 <a:solidFill>
                   <a:srgbClr val="222222"/>
                 </a:solidFill>
                 <a:latin typeface="Calibri"/>
               </a:rPr>
-              <a:t>• When a tx's raw vat_ratio ≥ 0.30, the engine's contribution is floored to ≥ THRESHOLD_RELEASE + ε (≈ 0.334).</a:t>
-            </a:r>
-          </a:p>
-          <a:p>
-            <a:pPr algn="l"/>
-            <a:r>
-              <a:rPr sz="1200">
+              <a:t>• Policy stance: any tx whose vat_ratio engine score ≥ 0.30 must at least INVESTIGATE, regardless of its weight.</a:t>
+            </a:r>
+          </a:p>
+          <a:p>
+            <a:pPr algn="l"/>
+            <a:r>
+              <a:rPr sz="1100">
                 <a:solidFill>
                   <a:srgbClr val="222222"/>
                 </a:solidFill>
                 <a:latin typeface="Calibri"/>
               </a:rPr>
-              <a:t>• Policy stance: any genuine rate mismatch above the xlsx's release tier (Score 1 ≥ 30) must at least INVESTIGATE, regardless of its weighted contribution.</a:t>
-            </a:r>
-          </a:p>
-          <a:p>
-            <a:pPr algn="l"/>
-            <a:r>
-              <a:rPr sz="1200">
+              <a:t>• Mechanism: when this triggers, the vat_ratio engine's WEIGHTED contribution is lifted to THRESHOLD_RELEASE + ε (≈ 0.334) before the sum — so even a graded rate mismatch can't be released on a low weight alone.</a:t>
+            </a:r>
+          </a:p>
+          <a:p>
+            <a:pPr algn="l"/>
+            <a:r>
+              <a:rPr sz="1100">
                 <a:solidFill>
                   <a:srgbClr val="222222"/>
                 </a:solidFill>
                 <a:latin typeface="Calibri"/>
               </a:rPr>
-              <a:t>• Trigger (0.30) sits between xlsx Release tier (Score 1 = 25) and Investigate tier (Score 1 ≥ 37.5). No row that xlsx releases gets unexpectedly bumped up.</a:t>
-            </a:r>
-          </a:p>
-        </p:txBody>
-      </p:sp>
-      <p:sp>
-        <p:nvSpPr>
-          <p:cNvPr id="15" name="Rectangle 14"/>
+              <a:t>• Trigger score (0.30) sits between the xlsx Release tier (Score 1 = 25) and Investigate tier (Score 1 ≥ 37.5).</a:t>
+            </a:r>
+          </a:p>
+        </p:txBody>
+      </p:sp>
+      <p:sp>
+        <p:nvSpPr>
+          <p:cNvPr id="16" name="Rectangle 15"/>
           <p:cNvSpPr/>
           <p:nvPr/>
         </p:nvSpPr>
         <p:spPr>
           <a:xfrm>
-            <a:off x="548640" y="5029200"/>
-            <a:ext cx="11155680" cy="1645920"/>
+            <a:off x="548640" y="5212080"/>
+            <a:ext cx="11155680" cy="1463040"/>
           </a:xfrm>
           <a:prstGeom prst="rect">
             <a:avLst/>
@@ -7220,7 +7323,7 @@
           <a:p>
             <a:pPr algn="l"/>
             <a:r>
-              <a:rPr b="1" sz="1600">
+              <a:rPr b="1" sz="1400">
                 <a:solidFill>
                   <a:srgbClr val="003399"/>
                 </a:solidFill>
@@ -7232,7 +7335,7 @@
           <a:p>
             <a:pPr algn="l"/>
             <a:r>
-              <a:rPr sz="1200">
+              <a:rPr sz="1100">
                 <a:solidFill>
                   <a:srgbClr val="222222"/>
                 </a:solidFill>
@@ -7244,25 +7347,13 @@
           <a:p>
             <a:pPr algn="l"/>
             <a:r>
-              <a:rPr sz="1200">
+              <a:rPr sz="1100">
                 <a:solidFill>
                   <a:srgbClr val="222222"/>
                 </a:solidFill>
                 <a:latin typeface="Calibri"/>
               </a:rPr>
-              <a:t>• confidence = applicable_received / applicable_expected. 0 %, 25 %, 50 %, 75 %, or 100 %.</a:t>
-            </a:r>
-          </a:p>
-          <a:p>
-            <a:pPr algn="l"/>
-            <a:r>
-              <a:rPr sz="1200">
-                <a:solidFill>
-                  <a:srgbClr val="222222"/>
-                </a:solidFill>
-                <a:latin typeface="Calibri"/>
-              </a:rPr>
-              <a:t>• If zero applicable engines report, score defaults to 0.5 (uncertain).</a:t>
+              <a:t>• confidence = applicable_received / applicable_expected (0 %, 25 %, 50 %, 75 %, or 100 %). If zero applicable engines report, case_score defaults to 0.5 (uncertain).</a:t>
             </a:r>
           </a:p>
         </p:txBody>
